--- a/ゲーム科2年/00_前期/ゲーム開発Ⅰ/12_継承を使ったカメラ管理.pptx
+++ b/ゲーム科2年/00_前期/ゲーム開発Ⅰ/12_継承を使ったカメラ管理.pptx
@@ -284,7 +284,7 @@
           <a:p>
             <a:fld id="{E9CC885B-4903-4D54-9A93-00025F12DED9}" type="datetimeFigureOut">
               <a:rPr kumimoji="1" lang="ja-JP" altLang="en-US" smtClean="0"/>
-              <a:t>2024/11/19</a:t>
+              <a:t>2025/1/6</a:t>
             </a:fld>
             <a:endParaRPr kumimoji="1" lang="ja-JP" altLang="en-US"/>
           </a:p>
@@ -514,7 +514,7 @@
           <a:p>
             <a:fld id="{E9CC885B-4903-4D54-9A93-00025F12DED9}" type="datetimeFigureOut">
               <a:rPr kumimoji="1" lang="ja-JP" altLang="en-US" smtClean="0"/>
-              <a:t>2024/11/19</a:t>
+              <a:t>2025/1/6</a:t>
             </a:fld>
             <a:endParaRPr kumimoji="1" lang="ja-JP" altLang="en-US"/>
           </a:p>
@@ -754,7 +754,7 @@
           <a:p>
             <a:fld id="{E9CC885B-4903-4D54-9A93-00025F12DED9}" type="datetimeFigureOut">
               <a:rPr kumimoji="1" lang="ja-JP" altLang="en-US" smtClean="0"/>
-              <a:t>2024/11/19</a:t>
+              <a:t>2025/1/6</a:t>
             </a:fld>
             <a:endParaRPr kumimoji="1" lang="ja-JP" altLang="en-US"/>
           </a:p>
@@ -984,7 +984,7 @@
           <a:p>
             <a:fld id="{E9CC885B-4903-4D54-9A93-00025F12DED9}" type="datetimeFigureOut">
               <a:rPr kumimoji="1" lang="ja-JP" altLang="en-US" smtClean="0"/>
-              <a:t>2024/11/19</a:t>
+              <a:t>2025/1/6</a:t>
             </a:fld>
             <a:endParaRPr kumimoji="1" lang="ja-JP" altLang="en-US"/>
           </a:p>
@@ -1259,7 +1259,7 @@
           <a:p>
             <a:fld id="{E9CC885B-4903-4D54-9A93-00025F12DED9}" type="datetimeFigureOut">
               <a:rPr kumimoji="1" lang="ja-JP" altLang="en-US" smtClean="0"/>
-              <a:t>2024/11/19</a:t>
+              <a:t>2025/1/6</a:t>
             </a:fld>
             <a:endParaRPr kumimoji="1" lang="ja-JP" altLang="en-US"/>
           </a:p>
@@ -1588,7 +1588,7 @@
           <a:p>
             <a:fld id="{E9CC885B-4903-4D54-9A93-00025F12DED9}" type="datetimeFigureOut">
               <a:rPr kumimoji="1" lang="ja-JP" altLang="en-US" smtClean="0"/>
-              <a:t>2024/11/19</a:t>
+              <a:t>2025/1/6</a:t>
             </a:fld>
             <a:endParaRPr kumimoji="1" lang="ja-JP" altLang="en-US"/>
           </a:p>
@@ -2064,7 +2064,7 @@
           <a:p>
             <a:fld id="{E9CC885B-4903-4D54-9A93-00025F12DED9}" type="datetimeFigureOut">
               <a:rPr kumimoji="1" lang="ja-JP" altLang="en-US" smtClean="0"/>
-              <a:t>2024/11/19</a:t>
+              <a:t>2025/1/6</a:t>
             </a:fld>
             <a:endParaRPr kumimoji="1" lang="ja-JP" altLang="en-US"/>
           </a:p>
@@ -2205,7 +2205,7 @@
           <a:p>
             <a:fld id="{E9CC885B-4903-4D54-9A93-00025F12DED9}" type="datetimeFigureOut">
               <a:rPr kumimoji="1" lang="ja-JP" altLang="en-US" smtClean="0"/>
-              <a:t>2024/11/19</a:t>
+              <a:t>2025/1/6</a:t>
             </a:fld>
             <a:endParaRPr kumimoji="1" lang="ja-JP" altLang="en-US"/>
           </a:p>
@@ -2318,7 +2318,7 @@
           <a:p>
             <a:fld id="{E9CC885B-4903-4D54-9A93-00025F12DED9}" type="datetimeFigureOut">
               <a:rPr kumimoji="1" lang="ja-JP" altLang="en-US" smtClean="0"/>
-              <a:t>2024/11/19</a:t>
+              <a:t>2025/1/6</a:t>
             </a:fld>
             <a:endParaRPr kumimoji="1" lang="ja-JP" altLang="en-US"/>
           </a:p>
@@ -2661,7 +2661,7 @@
           <a:p>
             <a:fld id="{E9CC885B-4903-4D54-9A93-00025F12DED9}" type="datetimeFigureOut">
               <a:rPr kumimoji="1" lang="ja-JP" altLang="en-US" smtClean="0"/>
-              <a:t>2024/11/19</a:t>
+              <a:t>2025/1/6</a:t>
             </a:fld>
             <a:endParaRPr kumimoji="1" lang="ja-JP" altLang="en-US"/>
           </a:p>
@@ -2949,7 +2949,7 @@
           <a:p>
             <a:fld id="{E9CC885B-4903-4D54-9A93-00025F12DED9}" type="datetimeFigureOut">
               <a:rPr kumimoji="1" lang="ja-JP" altLang="en-US" smtClean="0"/>
-              <a:t>2024/11/19</a:t>
+              <a:t>2025/1/6</a:t>
             </a:fld>
             <a:endParaRPr kumimoji="1" lang="ja-JP" altLang="en-US"/>
           </a:p>
@@ -3222,7 +3222,7 @@
           <a:p>
             <a:fld id="{E9CC885B-4903-4D54-9A93-00025F12DED9}" type="datetimeFigureOut">
               <a:rPr kumimoji="1" lang="ja-JP" altLang="en-US" smtClean="0"/>
-              <a:t>2024/11/19</a:t>
+              <a:t>2025/1/6</a:t>
             </a:fld>
             <a:endParaRPr kumimoji="1" lang="ja-JP" altLang="en-US"/>
           </a:p>
@@ -4754,7 +4754,7 @@
         <p:spPr>
           <a:xfrm>
             <a:off x="567542" y="1216429"/>
-            <a:ext cx="10851047" cy="461665"/>
+            <a:ext cx="10980891" cy="461665"/>
           </a:xfrm>
           <a:prstGeom prst="rect">
             <a:avLst/>
@@ -4772,9 +4772,9 @@
               <a:t>最後に</a:t>
             </a:r>
             <a:r>
-              <a:rPr lang="en-US" altLang="ja-JP" sz="2400" dirty="0" err="1">
+              <a:rPr lang="en-US" altLang="ja-JP" sz="2400" b="1" dirty="0" err="1">
                 <a:solidFill>
-                  <a:srgbClr val="0070C0"/>
+                  <a:srgbClr val="00B050"/>
                 </a:solidFill>
               </a:rPr>
               <a:t>CameraManager</a:t>
@@ -5753,6 +5753,58 @@
       </p:grpSpPr>
       <p:sp>
         <p:nvSpPr>
+          <p:cNvPr id="2" name="四角形: 角を丸くする 1">
+            <a:extLst>
+              <a:ext uri="{FF2B5EF4-FFF2-40B4-BE49-F238E27FC236}">
+                <a16:creationId xmlns:a16="http://schemas.microsoft.com/office/drawing/2014/main" id="{57A4D730-EACC-491F-AF01-0A4BB3981FE8}"/>
+              </a:ext>
+            </a:extLst>
+          </p:cNvPr>
+          <p:cNvSpPr/>
+          <p:nvPr/>
+        </p:nvSpPr>
+        <p:spPr>
+          <a:xfrm>
+            <a:off x="397933" y="2954867"/>
+            <a:ext cx="7740912" cy="1817582"/>
+          </a:xfrm>
+          <a:prstGeom prst="roundRect">
+            <a:avLst/>
+          </a:prstGeom>
+          <a:solidFill>
+            <a:schemeClr val="bg2"/>
+          </a:solidFill>
+          <a:ln>
+            <a:noFill/>
+          </a:ln>
+        </p:spPr>
+        <p:style>
+          <a:lnRef idx="2">
+            <a:schemeClr val="accent1">
+              <a:shade val="50000"/>
+            </a:schemeClr>
+          </a:lnRef>
+          <a:fillRef idx="1">
+            <a:schemeClr val="accent1"/>
+          </a:fillRef>
+          <a:effectRef idx="0">
+            <a:schemeClr val="accent1"/>
+          </a:effectRef>
+          <a:fontRef idx="minor">
+            <a:schemeClr val="lt1"/>
+          </a:fontRef>
+        </p:style>
+        <p:txBody>
+          <a:bodyPr rtlCol="0" anchor="ctr"/>
+          <a:lstStyle/>
+          <a:p>
+            <a:pPr algn="ctr"/>
+            <a:endParaRPr kumimoji="1" lang="ja-JP" altLang="en-US"/>
+          </a:p>
+        </p:txBody>
+      </p:sp>
+      <p:sp>
+        <p:nvSpPr>
           <p:cNvPr id="4" name="テキスト ボックス 3">
             <a:extLst>
               <a:ext uri="{FF2B5EF4-FFF2-40B4-BE49-F238E27FC236}">
@@ -7508,7 +7560,11 @@
               <a:t>・最低限の機能は</a:t>
             </a:r>
             <a:r>
-              <a:rPr lang="en-US" altLang="ja-JP" sz="2400" dirty="0" err="1"/>
+              <a:rPr lang="en-US" altLang="ja-JP" sz="2400" b="1" dirty="0" err="1">
+                <a:solidFill>
+                  <a:srgbClr val="00B050"/>
+                </a:solidFill>
+              </a:rPr>
               <a:t>CameraBase</a:t>
             </a:r>
             <a:r>
@@ -7580,7 +7636,11 @@
               <a:t>・最低限の機能は</a:t>
             </a:r>
             <a:r>
-              <a:rPr lang="en-US" altLang="ja-JP" sz="2400" dirty="0" err="1"/>
+              <a:rPr lang="en-US" altLang="ja-JP" sz="2400" b="1" dirty="0" err="1">
+                <a:solidFill>
+                  <a:srgbClr val="00B050"/>
+                </a:solidFill>
+              </a:rPr>
               <a:t>CameraBase</a:t>
             </a:r>
             <a:r>
@@ -7679,7 +7739,7 @@
         <p:spPr>
           <a:xfrm>
             <a:off x="567542" y="1216429"/>
-            <a:ext cx="6609502" cy="461665"/>
+            <a:ext cx="6761787" cy="461665"/>
           </a:xfrm>
           <a:prstGeom prst="rect">
             <a:avLst/>
@@ -7697,7 +7757,11 @@
               <a:t>まずは</a:t>
             </a:r>
             <a:r>
-              <a:rPr lang="en-US" altLang="ja-JP" sz="2400" dirty="0"/>
+              <a:rPr lang="en-US" altLang="ja-JP" sz="2400" b="1" dirty="0">
+                <a:solidFill>
+                  <a:srgbClr val="FF0000"/>
+                </a:solidFill>
+              </a:rPr>
               <a:t>CameraBase.cpp/h</a:t>
             </a:r>
             <a:r>
@@ -7825,7 +7889,7 @@
         <p:spPr>
           <a:xfrm>
             <a:off x="567542" y="1216429"/>
-            <a:ext cx="7572907" cy="461665"/>
+            <a:ext cx="7686720" cy="461665"/>
           </a:xfrm>
           <a:prstGeom prst="rect">
             <a:avLst/>
@@ -7843,11 +7907,19 @@
               <a:t>まずは</a:t>
             </a:r>
             <a:r>
-              <a:rPr lang="en-US" altLang="ja-JP" sz="2400" dirty="0" err="1"/>
+              <a:rPr lang="en-US" altLang="ja-JP" sz="2400" b="1" dirty="0" err="1">
+                <a:solidFill>
+                  <a:srgbClr val="FF0000"/>
+                </a:solidFill>
+              </a:rPr>
               <a:t>CameraBase</a:t>
             </a:r>
             <a:r>
-              <a:rPr lang="en-US" altLang="ja-JP" sz="2400" dirty="0"/>
+              <a:rPr lang="en-US" altLang="ja-JP" sz="2400" b="1" dirty="0">
+                <a:solidFill>
+                  <a:srgbClr val="FF0000"/>
+                </a:solidFill>
+              </a:rPr>
               <a:t>. h</a:t>
             </a:r>
             <a:r>
@@ -7975,7 +8047,7 @@
         <p:spPr>
           <a:xfrm>
             <a:off x="567542" y="1216429"/>
-            <a:ext cx="7572907" cy="461665"/>
+            <a:ext cx="7686720" cy="461665"/>
           </a:xfrm>
           <a:prstGeom prst="rect">
             <a:avLst/>
@@ -7993,11 +8065,19 @@
               <a:t>まずは</a:t>
             </a:r>
             <a:r>
-              <a:rPr lang="en-US" altLang="ja-JP" sz="2400" dirty="0" err="1"/>
+              <a:rPr lang="en-US" altLang="ja-JP" sz="2400" b="1" dirty="0" err="1">
+                <a:solidFill>
+                  <a:srgbClr val="FF0000"/>
+                </a:solidFill>
+              </a:rPr>
               <a:t>CameraBase</a:t>
             </a:r>
             <a:r>
-              <a:rPr lang="en-US" altLang="ja-JP" sz="2400" dirty="0"/>
+              <a:rPr lang="en-US" altLang="ja-JP" sz="2400" b="1" dirty="0">
+                <a:solidFill>
+                  <a:srgbClr val="FF0000"/>
+                </a:solidFill>
+              </a:rPr>
               <a:t>. h</a:t>
             </a:r>
             <a:r>
@@ -8125,7 +8205,7 @@
         <p:spPr>
           <a:xfrm>
             <a:off x="567542" y="1216429"/>
-            <a:ext cx="5359159" cy="461665"/>
+            <a:ext cx="5493812" cy="461665"/>
           </a:xfrm>
           <a:prstGeom prst="rect">
             <a:avLst/>
@@ -8139,7 +8219,11 @@
           <a:lstStyle/>
           <a:p>
             <a:r>
-              <a:rPr lang="en-US" altLang="ja-JP" sz="2400" dirty="0"/>
+              <a:rPr lang="en-US" altLang="ja-JP" sz="2400" b="1" dirty="0">
+                <a:solidFill>
+                  <a:srgbClr val="FF0000"/>
+                </a:solidFill>
+              </a:rPr>
               <a:t>CameraBase.cpp</a:t>
             </a:r>
             <a:r>

--- a/ゲーム科2年/00_前期/ゲーム開発Ⅰ/12_継承を使ったカメラ管理.pptx
+++ b/ゲーム科2年/00_前期/ゲーム開発Ⅰ/12_継承を使ったカメラ管理.pptx
@@ -284,7 +284,7 @@
           <a:p>
             <a:fld id="{E9CC885B-4903-4D54-9A93-00025F12DED9}" type="datetimeFigureOut">
               <a:rPr kumimoji="1" lang="ja-JP" altLang="en-US" smtClean="0"/>
-              <a:t>2025/1/6</a:t>
+              <a:t>2025/2/7</a:t>
             </a:fld>
             <a:endParaRPr kumimoji="1" lang="ja-JP" altLang="en-US"/>
           </a:p>
@@ -514,7 +514,7 @@
           <a:p>
             <a:fld id="{E9CC885B-4903-4D54-9A93-00025F12DED9}" type="datetimeFigureOut">
               <a:rPr kumimoji="1" lang="ja-JP" altLang="en-US" smtClean="0"/>
-              <a:t>2025/1/6</a:t>
+              <a:t>2025/2/7</a:t>
             </a:fld>
             <a:endParaRPr kumimoji="1" lang="ja-JP" altLang="en-US"/>
           </a:p>
@@ -754,7 +754,7 @@
           <a:p>
             <a:fld id="{E9CC885B-4903-4D54-9A93-00025F12DED9}" type="datetimeFigureOut">
               <a:rPr kumimoji="1" lang="ja-JP" altLang="en-US" smtClean="0"/>
-              <a:t>2025/1/6</a:t>
+              <a:t>2025/2/7</a:t>
             </a:fld>
             <a:endParaRPr kumimoji="1" lang="ja-JP" altLang="en-US"/>
           </a:p>
@@ -984,7 +984,7 @@
           <a:p>
             <a:fld id="{E9CC885B-4903-4D54-9A93-00025F12DED9}" type="datetimeFigureOut">
               <a:rPr kumimoji="1" lang="ja-JP" altLang="en-US" smtClean="0"/>
-              <a:t>2025/1/6</a:t>
+              <a:t>2025/2/7</a:t>
             </a:fld>
             <a:endParaRPr kumimoji="1" lang="ja-JP" altLang="en-US"/>
           </a:p>
@@ -1259,7 +1259,7 @@
           <a:p>
             <a:fld id="{E9CC885B-4903-4D54-9A93-00025F12DED9}" type="datetimeFigureOut">
               <a:rPr kumimoji="1" lang="ja-JP" altLang="en-US" smtClean="0"/>
-              <a:t>2025/1/6</a:t>
+              <a:t>2025/2/7</a:t>
             </a:fld>
             <a:endParaRPr kumimoji="1" lang="ja-JP" altLang="en-US"/>
           </a:p>
@@ -1588,7 +1588,7 @@
           <a:p>
             <a:fld id="{E9CC885B-4903-4D54-9A93-00025F12DED9}" type="datetimeFigureOut">
               <a:rPr kumimoji="1" lang="ja-JP" altLang="en-US" smtClean="0"/>
-              <a:t>2025/1/6</a:t>
+              <a:t>2025/2/7</a:t>
             </a:fld>
             <a:endParaRPr kumimoji="1" lang="ja-JP" altLang="en-US"/>
           </a:p>
@@ -2064,7 +2064,7 @@
           <a:p>
             <a:fld id="{E9CC885B-4903-4D54-9A93-00025F12DED9}" type="datetimeFigureOut">
               <a:rPr kumimoji="1" lang="ja-JP" altLang="en-US" smtClean="0"/>
-              <a:t>2025/1/6</a:t>
+              <a:t>2025/2/7</a:t>
             </a:fld>
             <a:endParaRPr kumimoji="1" lang="ja-JP" altLang="en-US"/>
           </a:p>
@@ -2205,7 +2205,7 @@
           <a:p>
             <a:fld id="{E9CC885B-4903-4D54-9A93-00025F12DED9}" type="datetimeFigureOut">
               <a:rPr kumimoji="1" lang="ja-JP" altLang="en-US" smtClean="0"/>
-              <a:t>2025/1/6</a:t>
+              <a:t>2025/2/7</a:t>
             </a:fld>
             <a:endParaRPr kumimoji="1" lang="ja-JP" altLang="en-US"/>
           </a:p>
@@ -2318,7 +2318,7 @@
           <a:p>
             <a:fld id="{E9CC885B-4903-4D54-9A93-00025F12DED9}" type="datetimeFigureOut">
               <a:rPr kumimoji="1" lang="ja-JP" altLang="en-US" smtClean="0"/>
-              <a:t>2025/1/6</a:t>
+              <a:t>2025/2/7</a:t>
             </a:fld>
             <a:endParaRPr kumimoji="1" lang="ja-JP" altLang="en-US"/>
           </a:p>
@@ -2661,7 +2661,7 @@
           <a:p>
             <a:fld id="{E9CC885B-4903-4D54-9A93-00025F12DED9}" type="datetimeFigureOut">
               <a:rPr kumimoji="1" lang="ja-JP" altLang="en-US" smtClean="0"/>
-              <a:t>2025/1/6</a:t>
+              <a:t>2025/2/7</a:t>
             </a:fld>
             <a:endParaRPr kumimoji="1" lang="ja-JP" altLang="en-US"/>
           </a:p>
@@ -2949,7 +2949,7 @@
           <a:p>
             <a:fld id="{E9CC885B-4903-4D54-9A93-00025F12DED9}" type="datetimeFigureOut">
               <a:rPr kumimoji="1" lang="ja-JP" altLang="en-US" smtClean="0"/>
-              <a:t>2025/1/6</a:t>
+              <a:t>2025/2/7</a:t>
             </a:fld>
             <a:endParaRPr kumimoji="1" lang="ja-JP" altLang="en-US"/>
           </a:p>
@@ -3222,7 +3222,7 @@
           <a:p>
             <a:fld id="{E9CC885B-4903-4D54-9A93-00025F12DED9}" type="datetimeFigureOut">
               <a:rPr kumimoji="1" lang="ja-JP" altLang="en-US" smtClean="0"/>
-              <a:t>2025/1/6</a:t>
+              <a:t>2025/2/7</a:t>
             </a:fld>
             <a:endParaRPr kumimoji="1" lang="ja-JP" altLang="en-US"/>
           </a:p>
@@ -5868,8 +5868,16 @@
           <a:lstStyle/>
           <a:p>
             <a:r>
+              <a:rPr lang="ja-JP" altLang="en-US" sz="2400" b="1" dirty="0">
+                <a:solidFill>
+                  <a:srgbClr val="FF0000"/>
+                </a:solidFill>
+              </a:rPr>
+              <a:t>クラスの継承</a:t>
+            </a:r>
+            <a:r>
               <a:rPr lang="ja-JP" altLang="en-US" sz="2400" dirty="0"/>
-              <a:t>クラスの継承を使いこなすと、</a:t>
+              <a:t>を使いこなすと、</a:t>
             </a:r>
             <a:endParaRPr lang="en-US" altLang="ja-JP" sz="2400" dirty="0"/>
           </a:p>
@@ -6473,7 +6481,7 @@
         <p:spPr>
           <a:xfrm>
             <a:off x="567542" y="1216429"/>
-            <a:ext cx="6415539" cy="461665"/>
+            <a:ext cx="6495689" cy="461665"/>
           </a:xfrm>
           <a:prstGeom prst="rect">
             <a:avLst/>
@@ -6491,7 +6499,11 @@
               <a:t>最後に</a:t>
             </a:r>
             <a:r>
-              <a:rPr lang="en-US" altLang="ja-JP" sz="2400" dirty="0"/>
+              <a:rPr lang="en-US" altLang="ja-JP" sz="2400" b="1" dirty="0">
+                <a:solidFill>
+                  <a:srgbClr val="FF0000"/>
+                </a:solidFill>
+              </a:rPr>
               <a:t>Main.cpp</a:t>
             </a:r>
             <a:r>
@@ -7039,6 +7051,60 @@
       </p:grpSpPr>
       <p:sp>
         <p:nvSpPr>
+          <p:cNvPr id="2" name="四角形: 角を丸くする 1">
+            <a:extLst>
+              <a:ext uri="{FF2B5EF4-FFF2-40B4-BE49-F238E27FC236}">
+                <a16:creationId xmlns:a16="http://schemas.microsoft.com/office/drawing/2014/main" id="{F945AA5A-4989-4927-B636-BB63AEDDC7A4}"/>
+              </a:ext>
+            </a:extLst>
+          </p:cNvPr>
+          <p:cNvSpPr/>
+          <p:nvPr/>
+        </p:nvSpPr>
+        <p:spPr>
+          <a:xfrm>
+            <a:off x="499533" y="4445000"/>
+            <a:ext cx="11159506" cy="2311400"/>
+          </a:xfrm>
+          <a:prstGeom prst="roundRect">
+            <a:avLst/>
+          </a:prstGeom>
+          <a:solidFill>
+            <a:schemeClr val="bg1">
+              <a:lumMod val="95000"/>
+            </a:schemeClr>
+          </a:solidFill>
+          <a:ln>
+            <a:noFill/>
+          </a:ln>
+        </p:spPr>
+        <p:style>
+          <a:lnRef idx="2">
+            <a:schemeClr val="accent1">
+              <a:shade val="50000"/>
+            </a:schemeClr>
+          </a:lnRef>
+          <a:fillRef idx="1">
+            <a:schemeClr val="accent1"/>
+          </a:fillRef>
+          <a:effectRef idx="0">
+            <a:schemeClr val="accent1"/>
+          </a:effectRef>
+          <a:fontRef idx="minor">
+            <a:schemeClr val="lt1"/>
+          </a:fontRef>
+        </p:style>
+        <p:txBody>
+          <a:bodyPr rtlCol="0" anchor="ctr"/>
+          <a:lstStyle/>
+          <a:p>
+            <a:pPr algn="ctr"/>
+            <a:endParaRPr kumimoji="1" lang="ja-JP" altLang="en-US"/>
+          </a:p>
+        </p:txBody>
+      </p:sp>
+      <p:sp>
+        <p:nvSpPr>
           <p:cNvPr id="4" name="テキスト ボックス 3">
             <a:extLst>
               <a:ext uri="{FF2B5EF4-FFF2-40B4-BE49-F238E27FC236}">
@@ -8427,8 +8493,16 @@
           </a:p>
           <a:p>
             <a:r>
+              <a:rPr lang="ja-JP" altLang="en-US" sz="2400" b="1" dirty="0">
+                <a:solidFill>
+                  <a:srgbClr val="FF0000"/>
+                </a:solidFill>
+              </a:rPr>
+              <a:t>基底クラスのデストラクタが呼ばれません</a:t>
+            </a:r>
+            <a:r>
               <a:rPr lang="ja-JP" altLang="en-US" sz="2400" dirty="0"/>
-              <a:t>基底クラスのデストラクタが呼ばれません。</a:t>
+              <a:t>。</a:t>
             </a:r>
             <a:endParaRPr lang="en-US" altLang="ja-JP" sz="2400" dirty="0"/>
           </a:p>
